--- a/slides/Week8_Recap.pptx
+++ b/slides/Week8_Recap.pptx
@@ -189,7 +189,7 @@
 <file path=ppt/revisionInfo.xml><?xml version="1.0" encoding="utf-8"?>
 <p1510:revInfo xmlns:a="http://schemas.openxmlformats.org/drawingml/2006/main" xmlns:r="http://schemas.openxmlformats.org/officeDocument/2006/relationships" xmlns:p1510="http://schemas.microsoft.com/office/powerpoint/2015/10/main">
   <p1510:revLst>
-    <p1510:client id="{7F51D186-7A40-49A6-BFA1-7EEB630AE0AF}" v="105" dt="2026-03-16T08:52:55.704"/>
+    <p1510:client id="{7F51D186-7A40-49A6-BFA1-7EEB630AE0AF}" v="111" dt="2026-03-17T03:46:18.937"/>
   </p1510:revLst>
 </p1510:revInfo>
 </file>
@@ -199,12 +199,12 @@
   <pc:docChgLst>
     <pc:chgData name="Zhao Jin" userId="cd05a825-544c-438a-9ba1-08e63db50b47" providerId="ADAL" clId="{5DF3A229-1965-414E-AF54-F4C37AC7DF68}"/>
     <pc:docChg chg="undo custSel addSld delSld modSld sldOrd">
-      <pc:chgData name="Zhao Jin" userId="cd05a825-544c-438a-9ba1-08e63db50b47" providerId="ADAL" clId="{5DF3A229-1965-414E-AF54-F4C37AC7DF68}" dt="2026-03-16T08:52:55.704" v="1836" actId="20577"/>
+      <pc:chgData name="Zhao Jin" userId="cd05a825-544c-438a-9ba1-08e63db50b47" providerId="ADAL" clId="{5DF3A229-1965-414E-AF54-F4C37AC7DF68}" dt="2026-03-17T03:46:20.950" v="1844"/>
       <pc:docMkLst>
         <pc:docMk/>
       </pc:docMkLst>
       <pc:sldChg chg="addSp delSp modSp mod addAnim delAnim modAnim">
-        <pc:chgData name="Zhao Jin" userId="cd05a825-544c-438a-9ba1-08e63db50b47" providerId="ADAL" clId="{5DF3A229-1965-414E-AF54-F4C37AC7DF68}" dt="2026-03-16T08:31:14.340" v="320"/>
+        <pc:chgData name="Zhao Jin" userId="cd05a825-544c-438a-9ba1-08e63db50b47" providerId="ADAL" clId="{5DF3A229-1965-414E-AF54-F4C37AC7DF68}" dt="2026-03-17T03:46:20.950" v="1844"/>
         <pc:sldMkLst>
           <pc:docMk/>
           <pc:sldMk cId="2489370454" sldId="605"/>
@@ -223,6 +223,38 @@
             <pc:docMk/>
             <pc:sldMk cId="2489370454" sldId="605"/>
             <ac:spMk id="8" creationId="{564A1DBB-19CA-BCD9-0044-9F6EA849A769}"/>
+          </ac:spMkLst>
+        </pc:spChg>
+        <pc:spChg chg="mod">
+          <ac:chgData name="Zhao Jin" userId="cd05a825-544c-438a-9ba1-08e63db50b47" providerId="ADAL" clId="{5DF3A229-1965-414E-AF54-F4C37AC7DF68}" dt="2026-03-17T03:45:37.727" v="1839" actId="571"/>
+          <ac:spMkLst>
+            <pc:docMk/>
+            <pc:sldMk cId="2489370454" sldId="605"/>
+            <ac:spMk id="10" creationId="{F3909803-CBA2-AE92-F099-0CA435CE47AC}"/>
+          </ac:spMkLst>
+        </pc:spChg>
+        <pc:spChg chg="mod">
+          <ac:chgData name="Zhao Jin" userId="cd05a825-544c-438a-9ba1-08e63db50b47" providerId="ADAL" clId="{5DF3A229-1965-414E-AF54-F4C37AC7DF68}" dt="2026-03-17T03:45:37.727" v="1839" actId="571"/>
+          <ac:spMkLst>
+            <pc:docMk/>
+            <pc:sldMk cId="2489370454" sldId="605"/>
+            <ac:spMk id="11" creationId="{C2DDC02D-B22D-36C2-3822-74153B569DAD}"/>
+          </ac:spMkLst>
+        </pc:spChg>
+        <pc:spChg chg="mod">
+          <ac:chgData name="Zhao Jin" userId="cd05a825-544c-438a-9ba1-08e63db50b47" providerId="ADAL" clId="{5DF3A229-1965-414E-AF54-F4C37AC7DF68}" dt="2026-03-17T03:45:37.727" v="1839" actId="571"/>
+          <ac:spMkLst>
+            <pc:docMk/>
+            <pc:sldMk cId="2489370454" sldId="605"/>
+            <ac:spMk id="13" creationId="{E0343249-F4F7-016A-0784-C004FC4BC4CA}"/>
+          </ac:spMkLst>
+        </pc:spChg>
+        <pc:spChg chg="mod">
+          <ac:chgData name="Zhao Jin" userId="cd05a825-544c-438a-9ba1-08e63db50b47" providerId="ADAL" clId="{5DF3A229-1965-414E-AF54-F4C37AC7DF68}" dt="2026-03-17T03:45:37.727" v="1839" actId="571"/>
+          <ac:spMkLst>
+            <pc:docMk/>
+            <pc:sldMk cId="2489370454" sldId="605"/>
+            <ac:spMk id="14" creationId="{6BF0495E-0A5E-1CDA-9084-4FFC47B8E7A1}"/>
           </ac:spMkLst>
         </pc:spChg>
         <pc:spChg chg="add mod">
@@ -511,6 +543,22 @@
             <pc:docMk/>
             <pc:sldMk cId="2489370454" sldId="605"/>
             <ac:grpSpMk id="5" creationId="{A269618B-B690-689D-FED2-5078E43C3B05}"/>
+          </ac:grpSpMkLst>
+        </pc:grpChg>
+        <pc:grpChg chg="add mod">
+          <ac:chgData name="Zhao Jin" userId="cd05a825-544c-438a-9ba1-08e63db50b47" providerId="ADAL" clId="{5DF3A229-1965-414E-AF54-F4C37AC7DF68}" dt="2026-03-17T03:45:37.727" v="1839" actId="571"/>
+          <ac:grpSpMkLst>
+            <pc:docMk/>
+            <pc:sldMk cId="2489370454" sldId="605"/>
+            <ac:grpSpMk id="9" creationId="{079C5BA5-9068-CA82-9D3C-0E3CDBA41A45}"/>
+          </ac:grpSpMkLst>
+        </pc:grpChg>
+        <pc:grpChg chg="add mod">
+          <ac:chgData name="Zhao Jin" userId="cd05a825-544c-438a-9ba1-08e63db50b47" providerId="ADAL" clId="{5DF3A229-1965-414E-AF54-F4C37AC7DF68}" dt="2026-03-17T03:45:37.727" v="1839" actId="571"/>
+          <ac:grpSpMkLst>
+            <pc:docMk/>
+            <pc:sldMk cId="2489370454" sldId="605"/>
+            <ac:grpSpMk id="12" creationId="{95121482-2111-BEA0-DE61-1EFCE426E5E9}"/>
           </ac:grpSpMkLst>
         </pc:grpChg>
         <pc:grpChg chg="add mod">
@@ -1325,7 +1373,7 @@
               <a:pPr>
                 <a:defRPr/>
               </a:pPr>
-              <a:t>3/16/2026</a:t>
+              <a:t>3/17/2026</a:t>
             </a:fld>
             <a:endParaRPr lang="en-US"/>
           </a:p>
@@ -14601,6 +14649,87 @@
                                   </p:childTnLst>
                                 </p:cTn>
                               </p:par>
+                              <p:par>
+                                <p:cTn id="25" presetID="1" presetClass="entr" presetSubtype="0" fill="hold" nodeType="withEffect">
+                                  <p:stCondLst>
+                                    <p:cond delay="0"/>
+                                  </p:stCondLst>
+                                  <p:childTnLst>
+                                    <p:set>
+                                      <p:cBhvr>
+                                        <p:cTn id="26" dur="1" fill="hold">
+                                          <p:stCondLst>
+                                            <p:cond delay="0"/>
+                                          </p:stCondLst>
+                                        </p:cTn>
+                                        <p:tgtEl>
+                                          <p:spTgt spid="62"/>
+                                        </p:tgtEl>
+                                        <p:attrNameLst>
+                                          <p:attrName>style.visibility</p:attrName>
+                                        </p:attrNameLst>
+                                      </p:cBhvr>
+                                      <p:to>
+                                        <p:strVal val="visible"/>
+                                      </p:to>
+                                    </p:set>
+                                  </p:childTnLst>
+                                </p:cTn>
+                              </p:par>
+                              <p:par>
+                                <p:cTn id="27" presetID="1" presetClass="entr" presetSubtype="0" fill="hold" nodeType="withEffect">
+                                  <p:stCondLst>
+                                    <p:cond delay="0"/>
+                                  </p:stCondLst>
+                                  <p:childTnLst>
+                                    <p:set>
+                                      <p:cBhvr>
+                                        <p:cTn id="28" dur="1" fill="hold">
+                                          <p:stCondLst>
+                                            <p:cond delay="0"/>
+                                          </p:stCondLst>
+                                        </p:cTn>
+                                        <p:tgtEl>
+                                          <p:spTgt spid="21"/>
+                                        </p:tgtEl>
+                                        <p:attrNameLst>
+                                          <p:attrName>style.visibility</p:attrName>
+                                        </p:attrNameLst>
+                                      </p:cBhvr>
+                                      <p:to>
+                                        <p:strVal val="visible"/>
+                                      </p:to>
+                                    </p:set>
+                                  </p:childTnLst>
+                                </p:cTn>
+                              </p:par>
+                              <p:par>
+                                <p:cTn id="29" presetID="1" presetClass="entr" presetSubtype="0" fill="hold" nodeType="withEffect">
+                                  <p:stCondLst>
+                                    <p:cond delay="0"/>
+                                  </p:stCondLst>
+                                  <p:childTnLst>
+                                    <p:set>
+                                      <p:cBhvr>
+                                        <p:cTn id="30" dur="1" fill="hold">
+                                          <p:stCondLst>
+                                            <p:cond delay="0"/>
+                                          </p:stCondLst>
+                                        </p:cTn>
+                                        <p:tgtEl>
+                                          <p:spTgt spid="38"/>
+                                        </p:tgtEl>
+                                        <p:attrNameLst>
+                                          <p:attrName>style.visibility</p:attrName>
+                                        </p:attrNameLst>
+                                      </p:cBhvr>
+                                      <p:to>
+                                        <p:strVal val="visible"/>
+                                      </p:to>
+                                    </p:set>
+                                  </p:childTnLst>
+                                </p:cTn>
+                              </p:par>
                             </p:childTnLst>
                           </p:cTn>
                         </p:par>
@@ -14608,26 +14737,26 @@
                     </p:cTn>
                   </p:par>
                   <p:par>
-                    <p:cTn id="25" fill="hold">
+                    <p:cTn id="31" fill="hold">
                       <p:stCondLst>
                         <p:cond delay="indefinite"/>
                       </p:stCondLst>
                       <p:childTnLst>
                         <p:par>
-                          <p:cTn id="26" fill="hold">
+                          <p:cTn id="32" fill="hold">
                             <p:stCondLst>
                               <p:cond delay="0"/>
                             </p:stCondLst>
                             <p:childTnLst>
                               <p:par>
-                                <p:cTn id="27" presetID="1" presetClass="entr" presetSubtype="0" fill="hold" nodeType="clickEffect">
+                                <p:cTn id="33" presetID="1" presetClass="entr" presetSubtype="0" fill="hold" nodeType="clickEffect">
                                   <p:stCondLst>
                                     <p:cond delay="0"/>
                                   </p:stCondLst>
                                   <p:childTnLst>
                                     <p:set>
                                       <p:cBhvr>
-                                        <p:cTn id="28" dur="1" fill="hold">
+                                        <p:cTn id="34" dur="1" fill="hold">
                                           <p:stCondLst>
                                             <p:cond delay="0"/>
                                           </p:stCondLst>
@@ -14653,26 +14782,26 @@
                     </p:cTn>
                   </p:par>
                   <p:par>
-                    <p:cTn id="29" fill="hold">
+                    <p:cTn id="35" fill="hold">
                       <p:stCondLst>
                         <p:cond delay="indefinite"/>
                       </p:stCondLst>
                       <p:childTnLst>
                         <p:par>
-                          <p:cTn id="30" fill="hold">
+                          <p:cTn id="36" fill="hold">
                             <p:stCondLst>
                               <p:cond delay="0"/>
                             </p:stCondLst>
                             <p:childTnLst>
                               <p:par>
-                                <p:cTn id="31" presetID="1" presetClass="entr" presetSubtype="0" fill="hold" nodeType="clickEffect">
+                                <p:cTn id="37" presetID="1" presetClass="entr" presetSubtype="0" fill="hold" nodeType="clickEffect">
                                   <p:stCondLst>
                                     <p:cond delay="0"/>
                                   </p:stCondLst>
                                   <p:childTnLst>
                                     <p:set>
                                       <p:cBhvr>
-                                        <p:cTn id="32" dur="1" fill="hold">
+                                        <p:cTn id="38" dur="1" fill="hold">
                                           <p:stCondLst>
                                             <p:cond delay="0"/>
                                           </p:stCondLst>
@@ -14698,26 +14827,26 @@
                     </p:cTn>
                   </p:par>
                   <p:par>
-                    <p:cTn id="33" fill="hold">
+                    <p:cTn id="39" fill="hold">
                       <p:stCondLst>
                         <p:cond delay="indefinite"/>
                       </p:stCondLst>
                       <p:childTnLst>
                         <p:par>
-                          <p:cTn id="34" fill="hold">
+                          <p:cTn id="40" fill="hold">
                             <p:stCondLst>
                               <p:cond delay="0"/>
                             </p:stCondLst>
                             <p:childTnLst>
                               <p:par>
-                                <p:cTn id="35" presetID="1" presetClass="entr" presetSubtype="0" fill="hold" nodeType="clickEffect">
+                                <p:cTn id="41" presetID="1" presetClass="entr" presetSubtype="0" fill="hold" nodeType="clickEffect">
                                   <p:stCondLst>
                                     <p:cond delay="0"/>
                                   </p:stCondLst>
                                   <p:childTnLst>
                                     <p:set>
                                       <p:cBhvr>
-                                        <p:cTn id="36" dur="1" fill="hold">
+                                        <p:cTn id="42" dur="1" fill="hold">
                                           <p:stCondLst>
                                             <p:cond delay="0"/>
                                           </p:stCondLst>
@@ -14747,26 +14876,26 @@
                     </p:cTn>
                   </p:par>
                   <p:par>
-                    <p:cTn id="37" fill="hold">
+                    <p:cTn id="43" fill="hold">
                       <p:stCondLst>
                         <p:cond delay="indefinite"/>
                       </p:stCondLst>
                       <p:childTnLst>
                         <p:par>
-                          <p:cTn id="38" fill="hold">
+                          <p:cTn id="44" fill="hold">
                             <p:stCondLst>
                               <p:cond delay="0"/>
                             </p:stCondLst>
                             <p:childTnLst>
                               <p:par>
-                                <p:cTn id="39" presetID="1" presetClass="entr" presetSubtype="0" fill="hold" nodeType="clickEffect">
+                                <p:cTn id="45" presetID="1" presetClass="entr" presetSubtype="0" fill="hold" nodeType="clickEffect">
                                   <p:stCondLst>
                                     <p:cond delay="0"/>
                                   </p:stCondLst>
                                   <p:childTnLst>
                                     <p:set>
                                       <p:cBhvr>
-                                        <p:cTn id="40" dur="1" fill="hold">
+                                        <p:cTn id="46" dur="1" fill="hold">
                                           <p:stCondLst>
                                             <p:cond delay="0"/>
                                           </p:stCondLst>
@@ -14792,26 +14921,26 @@
                     </p:cTn>
                   </p:par>
                   <p:par>
-                    <p:cTn id="41" fill="hold">
+                    <p:cTn id="47" fill="hold">
                       <p:stCondLst>
                         <p:cond delay="indefinite"/>
                       </p:stCondLst>
                       <p:childTnLst>
                         <p:par>
-                          <p:cTn id="42" fill="hold">
+                          <p:cTn id="48" fill="hold">
                             <p:stCondLst>
                               <p:cond delay="0"/>
                             </p:stCondLst>
                             <p:childTnLst>
                               <p:par>
-                                <p:cTn id="43" presetID="1" presetClass="entr" presetSubtype="0" fill="hold" nodeType="clickEffect">
+                                <p:cTn id="49" presetID="1" presetClass="entr" presetSubtype="0" fill="hold" nodeType="clickEffect">
                                   <p:stCondLst>
                                     <p:cond delay="0"/>
                                   </p:stCondLst>
                                   <p:childTnLst>
                                     <p:set>
                                       <p:cBhvr>
-                                        <p:cTn id="44" dur="1" fill="hold">
+                                        <p:cTn id="50" dur="1" fill="hold">
                                           <p:stCondLst>
                                             <p:cond delay="0"/>
                                           </p:stCondLst>
@@ -14835,14 +14964,14 @@
                                 </p:cTn>
                               </p:par>
                               <p:par>
-                                <p:cTn id="45" presetID="1" presetClass="entr" presetSubtype="0" fill="hold" nodeType="withEffect">
+                                <p:cTn id="51" presetID="1" presetClass="entr" presetSubtype="0" fill="hold" nodeType="withEffect">
                                   <p:stCondLst>
                                     <p:cond delay="0"/>
                                   </p:stCondLst>
                                   <p:childTnLst>
                                     <p:set>
                                       <p:cBhvr>
-                                        <p:cTn id="46" dur="1" fill="hold">
+                                        <p:cTn id="52" dur="1" fill="hold">
                                           <p:stCondLst>
                                             <p:cond delay="0"/>
                                           </p:stCondLst>
@@ -14866,14 +14995,14 @@
                                 </p:cTn>
                               </p:par>
                               <p:par>
-                                <p:cTn id="47" presetID="1" presetClass="entr" presetSubtype="0" fill="hold" nodeType="withEffect">
+                                <p:cTn id="53" presetID="1" presetClass="entr" presetSubtype="0" fill="hold" nodeType="withEffect">
                                   <p:stCondLst>
                                     <p:cond delay="0"/>
                                   </p:stCondLst>
                                   <p:childTnLst>
                                     <p:set>
                                       <p:cBhvr>
-                                        <p:cTn id="48" dur="1" fill="hold">
+                                        <p:cTn id="54" dur="1" fill="hold">
                                           <p:stCondLst>
                                             <p:cond delay="0"/>
                                           </p:stCondLst>
@@ -14896,39 +15025,21 @@
                                   </p:childTnLst>
                                 </p:cTn>
                               </p:par>
-                            </p:childTnLst>
-                          </p:cTn>
-                        </p:par>
-                      </p:childTnLst>
-                    </p:cTn>
-                  </p:par>
-                  <p:par>
-                    <p:cTn id="49" fill="hold">
-                      <p:stCondLst>
-                        <p:cond delay="indefinite"/>
-                      </p:stCondLst>
-                      <p:childTnLst>
-                        <p:par>
-                          <p:cTn id="50" fill="hold">
-                            <p:stCondLst>
-                              <p:cond delay="0"/>
-                            </p:stCondLst>
-                            <p:childTnLst>
                               <p:par>
-                                <p:cTn id="51" presetID="1" presetClass="entr" presetSubtype="0" fill="hold" nodeType="clickEffect">
+                                <p:cTn id="55" presetID="1" presetClass="entr" presetSubtype="0" fill="hold" nodeType="withEffect">
                                   <p:stCondLst>
                                     <p:cond delay="0"/>
                                   </p:stCondLst>
                                   <p:childTnLst>
                                     <p:set>
                                       <p:cBhvr>
-                                        <p:cTn id="52" dur="1" fill="hold">
+                                        <p:cTn id="56" dur="1" fill="hold">
                                           <p:stCondLst>
                                             <p:cond delay="0"/>
                                           </p:stCondLst>
                                         </p:cTn>
                                         <p:tgtEl>
-                                          <p:spTgt spid="14361"/>
+                                          <p:spTgt spid="14354"/>
                                         </p:tgtEl>
                                         <p:attrNameLst>
                                           <p:attrName>style.visibility</p:attrName>
@@ -14941,39 +15052,21 @@
                                   </p:childTnLst>
                                 </p:cTn>
                               </p:par>
-                            </p:childTnLst>
-                          </p:cTn>
-                        </p:par>
-                      </p:childTnLst>
-                    </p:cTn>
-                  </p:par>
-                  <p:par>
-                    <p:cTn id="53" fill="hold">
-                      <p:stCondLst>
-                        <p:cond delay="indefinite"/>
-                      </p:stCondLst>
-                      <p:childTnLst>
-                        <p:par>
-                          <p:cTn id="54" fill="hold">
-                            <p:stCondLst>
-                              <p:cond delay="0"/>
-                            </p:stCondLst>
-                            <p:childTnLst>
                               <p:par>
-                                <p:cTn id="55" presetID="1" presetClass="entr" presetSubtype="0" fill="hold" nodeType="clickEffect">
+                                <p:cTn id="57" presetID="1" presetClass="entr" presetSubtype="0" fill="hold" nodeType="withEffect">
                                   <p:stCondLst>
                                     <p:cond delay="0"/>
                                   </p:stCondLst>
                                   <p:childTnLst>
                                     <p:set>
                                       <p:cBhvr>
-                                        <p:cTn id="56" dur="1" fill="hold">
+                                        <p:cTn id="58" dur="1" fill="hold">
                                           <p:stCondLst>
                                             <p:cond delay="0"/>
                                           </p:stCondLst>
                                         </p:cTn>
                                         <p:tgtEl>
-                                          <p:spTgt spid="14360"/>
+                                          <p:spTgt spid="14357"/>
                                         </p:tgtEl>
                                         <p:attrNameLst>
                                           <p:attrName>style.visibility</p:attrName>
@@ -14986,26 +15079,8 @@
                                   </p:childTnLst>
                                 </p:cTn>
                               </p:par>
-                            </p:childTnLst>
-                          </p:cTn>
-                        </p:par>
-                      </p:childTnLst>
-                    </p:cTn>
-                  </p:par>
-                  <p:par>
-                    <p:cTn id="57" fill="hold">
-                      <p:stCondLst>
-                        <p:cond delay="indefinite"/>
-                      </p:stCondLst>
-                      <p:childTnLst>
-                        <p:par>
-                          <p:cTn id="58" fill="hold">
-                            <p:stCondLst>
-                              <p:cond delay="0"/>
-                            </p:stCondLst>
-                            <p:childTnLst>
                               <p:par>
-                                <p:cTn id="59" presetID="1" presetClass="entr" presetSubtype="0" fill="hold" nodeType="clickEffect">
+                                <p:cTn id="59" presetID="1" presetClass="entr" presetSubtype="0" fill="hold" nodeType="withEffect">
                                   <p:stCondLst>
                                     <p:cond delay="0"/>
                                   </p:stCondLst>
@@ -15018,11 +15093,7 @@
                                           </p:stCondLst>
                                         </p:cTn>
                                         <p:tgtEl>
-                                          <p:spTgt spid="14364">
-                                            <p:txEl>
-                                              <p:pRg st="4" end="4"/>
-                                            </p:txEl>
-                                          </p:spTgt>
+                                          <p:spTgt spid="14344"/>
                                         </p:tgtEl>
                                         <p:attrNameLst>
                                           <p:attrName>style.visibility</p:attrName>
@@ -15062,6 +15133,145 @@
                                     <p:set>
                                       <p:cBhvr>
                                         <p:cTn id="64" dur="1" fill="hold">
+                                          <p:stCondLst>
+                                            <p:cond delay="0"/>
+                                          </p:stCondLst>
+                                        </p:cTn>
+                                        <p:tgtEl>
+                                          <p:spTgt spid="14361"/>
+                                        </p:tgtEl>
+                                        <p:attrNameLst>
+                                          <p:attrName>style.visibility</p:attrName>
+                                        </p:attrNameLst>
+                                      </p:cBhvr>
+                                      <p:to>
+                                        <p:strVal val="visible"/>
+                                      </p:to>
+                                    </p:set>
+                                  </p:childTnLst>
+                                </p:cTn>
+                              </p:par>
+                            </p:childTnLst>
+                          </p:cTn>
+                        </p:par>
+                      </p:childTnLst>
+                    </p:cTn>
+                  </p:par>
+                  <p:par>
+                    <p:cTn id="65" fill="hold">
+                      <p:stCondLst>
+                        <p:cond delay="indefinite"/>
+                      </p:stCondLst>
+                      <p:childTnLst>
+                        <p:par>
+                          <p:cTn id="66" fill="hold">
+                            <p:stCondLst>
+                              <p:cond delay="0"/>
+                            </p:stCondLst>
+                            <p:childTnLst>
+                              <p:par>
+                                <p:cTn id="67" presetID="1" presetClass="entr" presetSubtype="0" fill="hold" nodeType="clickEffect">
+                                  <p:stCondLst>
+                                    <p:cond delay="0"/>
+                                  </p:stCondLst>
+                                  <p:childTnLst>
+                                    <p:set>
+                                      <p:cBhvr>
+                                        <p:cTn id="68" dur="1" fill="hold">
+                                          <p:stCondLst>
+                                            <p:cond delay="0"/>
+                                          </p:stCondLst>
+                                        </p:cTn>
+                                        <p:tgtEl>
+                                          <p:spTgt spid="14360"/>
+                                        </p:tgtEl>
+                                        <p:attrNameLst>
+                                          <p:attrName>style.visibility</p:attrName>
+                                        </p:attrNameLst>
+                                      </p:cBhvr>
+                                      <p:to>
+                                        <p:strVal val="visible"/>
+                                      </p:to>
+                                    </p:set>
+                                  </p:childTnLst>
+                                </p:cTn>
+                              </p:par>
+                            </p:childTnLst>
+                          </p:cTn>
+                        </p:par>
+                      </p:childTnLst>
+                    </p:cTn>
+                  </p:par>
+                  <p:par>
+                    <p:cTn id="69" fill="hold">
+                      <p:stCondLst>
+                        <p:cond delay="indefinite"/>
+                      </p:stCondLst>
+                      <p:childTnLst>
+                        <p:par>
+                          <p:cTn id="70" fill="hold">
+                            <p:stCondLst>
+                              <p:cond delay="0"/>
+                            </p:stCondLst>
+                            <p:childTnLst>
+                              <p:par>
+                                <p:cTn id="71" presetID="1" presetClass="entr" presetSubtype="0" fill="hold" nodeType="clickEffect">
+                                  <p:stCondLst>
+                                    <p:cond delay="0"/>
+                                  </p:stCondLst>
+                                  <p:childTnLst>
+                                    <p:set>
+                                      <p:cBhvr>
+                                        <p:cTn id="72" dur="1" fill="hold">
+                                          <p:stCondLst>
+                                            <p:cond delay="0"/>
+                                          </p:stCondLst>
+                                        </p:cTn>
+                                        <p:tgtEl>
+                                          <p:spTgt spid="14364">
+                                            <p:txEl>
+                                              <p:pRg st="4" end="4"/>
+                                            </p:txEl>
+                                          </p:spTgt>
+                                        </p:tgtEl>
+                                        <p:attrNameLst>
+                                          <p:attrName>style.visibility</p:attrName>
+                                        </p:attrNameLst>
+                                      </p:cBhvr>
+                                      <p:to>
+                                        <p:strVal val="visible"/>
+                                      </p:to>
+                                    </p:set>
+                                  </p:childTnLst>
+                                </p:cTn>
+                              </p:par>
+                            </p:childTnLst>
+                          </p:cTn>
+                        </p:par>
+                      </p:childTnLst>
+                    </p:cTn>
+                  </p:par>
+                  <p:par>
+                    <p:cTn id="73" fill="hold">
+                      <p:stCondLst>
+                        <p:cond delay="indefinite"/>
+                      </p:stCondLst>
+                      <p:childTnLst>
+                        <p:par>
+                          <p:cTn id="74" fill="hold">
+                            <p:stCondLst>
+                              <p:cond delay="0"/>
+                            </p:stCondLst>
+                            <p:childTnLst>
+                              <p:par>
+                                <p:cTn id="75" presetID="1" presetClass="entr" presetSubtype="0" fill="hold" nodeType="clickEffect">
+                                  <p:stCondLst>
+                                    <p:cond delay="0"/>
+                                  </p:stCondLst>
+                                  <p:childTnLst>
+                                    <p:set>
+                                      <p:cBhvr>
+                                        <p:cTn id="76" dur="1" fill="hold">
                                           <p:stCondLst>
                                             <p:cond delay="0"/>
                                           </p:stCondLst>
